--- a/ABC_ourney.pptx
+++ b/ABC_ourney.pptx
@@ -11,6 +11,7 @@
     <p:sldId id="259" r:id="rId5"/>
     <p:sldId id="260" r:id="rId6"/>
     <p:sldId id="261" r:id="rId7"/>
+    <p:sldId id="264" r:id="rId15"/>
     <p:sldId id="262" r:id="rId8"/>
     <p:sldId id="263" r:id="rId9"/>
   </p:sldIdLst>
@@ -8579,6 +8580,1371 @@
               <a:t>Thank You  ·  Questions?</a:t>
             </a:r>
             <a:endParaRPr lang="en-US" sz="1400" dirty="0"/>
+          </a:p>
+        </p:txBody>
+      </p:sp>
+    </p:spTree>
+  </p:cSld>
+  <p:clrMapOvr>
+    <a:masterClrMapping/>
+  </p:clrMapOvr>
+</p:sld>
+</file>
+
+<file path=ppt/slides/slide9.xml><?xml version="1.0" encoding="utf-8"?>
+<p:sld xmlns:a="http://schemas.openxmlformats.org/drawingml/2006/main" xmlns:p="http://schemas.openxmlformats.org/presentationml/2006/main" xmlns:r="http://schemas.openxmlformats.org/officeDocument/2006/relationships">
+  <p:cSld>
+    <p:spTree>
+      <p:nvGrpSpPr>
+        <p:cNvPr id="1" name=""/>
+        <p:cNvGrpSpPr/>
+        <p:nvPr/>
+      </p:nvGrpSpPr>
+      <p:grpSpPr>
+        <a:xfrm>
+          <a:off x="0" y="0"/>
+          <a:ext cx="0" cy="0"/>
+          <a:chOff x="0" y="0"/>
+          <a:chExt cx="0" cy="0"/>
+        </a:xfrm>
+      </p:grpSpPr>
+      <p:sp>
+        <p:nvSpPr>
+          <p:cNvPr id="2" name="Shape 0"/>
+          <p:cNvSpPr/>
+          <p:nvPr/>
+        </p:nvSpPr>
+        <p:spPr>
+          <a:xfrm>
+            <a:off x="0" y="0"/>
+            <a:ext cx="9144000" cy="1005840"/>
+          </a:xfrm>
+          <a:prstGeom prst="rect">
+            <a:avLst/>
+          </a:prstGeom>
+          <a:solidFill>
+            <a:srgbClr val="0D1B2A"/>
+          </a:solidFill>
+          <a:ln w="12700">
+            <a:solidFill>
+              <a:srgbClr val="0D1B2A"/>
+            </a:solidFill>
+            <a:prstDash val="solid"/>
+          </a:ln>
+        </p:spPr>
+      </p:sp>
+      <p:sp>
+        <p:nvSpPr>
+          <p:cNvPr id="3" name="Text 1"/>
+          <p:cNvSpPr/>
+          <p:nvPr/>
+        </p:nvSpPr>
+        <p:spPr>
+          <a:xfrm>
+            <a:off x="365760" y="0"/>
+            <a:ext cx="8412480" cy="1005840"/>
+          </a:xfrm>
+          <a:prstGeom prst="rect">
+            <a:avLst/>
+          </a:prstGeom>
+          <a:noFill/>
+          <a:ln/>
+        </p:spPr>
+        <p:txBody>
+          <a:bodyPr wrap="square" rtlCol="0" anchor="ctr"/>
+          <a:lstStyle/>
+          <a:p>
+            <a:pPr indent="0" marL="0">
+              <a:buNone/>
+            </a:pPr>
+            <a:r>
+              <a:rPr lang="en-US" sz="2400" b="1" dirty="0">
+                <a:solidFill>
+                  <a:srgbClr val="FFFFFF"/>
+                </a:solidFill>
+              </a:rPr>
+              <a:t>Confluent DR: Service Discovery Pattern</a:t>
+            </a:r>
+            <a:endParaRPr lang="en-US" sz="2400" dirty="0"/>
+          </a:p>
+        </p:txBody>
+      </p:sp>
+      <p:sp>
+        <p:nvSpPr>
+          <p:cNvPr id="4" name="Shape 2"/>
+          <p:cNvSpPr/>
+          <p:nvPr/>
+        </p:nvSpPr>
+        <p:spPr>
+          <a:xfrm>
+            <a:off x="228600" y="1078992"/>
+            <a:ext cx="8686800" cy="475488"/>
+          </a:xfrm>
+          <a:prstGeom prst="roundRect">
+            <a:avLst>
+              <a:gd name="adj" fmla="val 15385"/>
+            </a:avLst>
+          </a:prstGeom>
+          <a:solidFill>
+            <a:srgbClr val="FFF5F5"/>
+          </a:solidFill>
+          <a:ln w="12700">
+            <a:solidFill>
+              <a:srgbClr val="C53030"/>
+            </a:solidFill>
+            <a:prstDash val="solid"/>
+          </a:ln>
+        </p:spPr>
+      </p:sp>
+      <p:sp>
+        <p:nvSpPr>
+          <p:cNvPr id="5" name="Text 3"/>
+          <p:cNvSpPr/>
+          <p:nvPr/>
+        </p:nvSpPr>
+        <p:spPr>
+          <a:xfrm>
+            <a:off x="320040" y="1078992"/>
+            <a:ext cx="8503920" cy="475488"/>
+          </a:xfrm>
+          <a:prstGeom prst="rect">
+            <a:avLst/>
+          </a:prstGeom>
+          <a:noFill/>
+          <a:ln/>
+        </p:spPr>
+        <p:txBody>
+          <a:bodyPr wrap="square" rtlCol="0" anchor="ctr"/>
+          <a:lstStyle/>
+          <a:p>
+            <a:pPr indent="0" marL="0">
+              <a:buNone/>
+            </a:pPr>
+            <a:r>
+              <a:rPr lang="en-US" sz="1100" b="1" dirty="0">
+                <a:solidFill>
+                  <a:srgbClr val="C53030"/>
+                </a:solidFill>
+              </a:rPr>
+              <a:t>⚠  Challenge: Confluent Cloud has NO automatic DR failover/failback — it is a user-managed switchover, and each cluster has a different broker URL</a:t>
+            </a:r>
+            <a:endParaRPr lang="en-US" sz="1100" dirty="0"/>
+          </a:p>
+        </p:txBody>
+      </p:sp>
+      <p:sp>
+        <p:nvSpPr>
+          <p:cNvPr id="6" name="Shape 4"/>
+          <p:cNvSpPr/>
+          <p:nvPr/>
+        </p:nvSpPr>
+        <p:spPr>
+          <a:xfrm>
+            <a:off x="182880" y="1737360"/>
+            <a:ext cx="1417320" cy="914400"/>
+          </a:xfrm>
+          <a:prstGeom prst="roundRect">
+            <a:avLst>
+              <a:gd name="adj" fmla="val 10000"/>
+            </a:avLst>
+          </a:prstGeom>
+          <a:solidFill>
+            <a:srgbClr val="FFF5F5"/>
+          </a:solidFill>
+          <a:ln w="12700">
+            <a:solidFill>
+              <a:srgbClr val="C53030"/>
+            </a:solidFill>
+            <a:prstDash val="solid"/>
+          </a:ln>
+          <a:effectLst>
+            <a:outerShdw sx="100000" sy="100000" kx="0" ky="0" algn="bl" rotWithShape="0" blurRad="101600" dist="38100" dir="2700000">
+              <a:srgbClr val="000000">
+                <a:alpha val="12000"/>
+              </a:srgbClr>
+            </a:outerShdw>
+          </a:effectLst>
+        </p:spPr>
+      </p:sp>
+      <p:sp>
+        <p:nvSpPr>
+          <p:cNvPr id="7" name="Text 5"/>
+          <p:cNvSpPr/>
+          <p:nvPr/>
+        </p:nvSpPr>
+        <p:spPr>
+          <a:xfrm>
+            <a:off x="182880" y="1773936"/>
+            <a:ext cx="1417320" cy="438912"/>
+          </a:xfrm>
+          <a:prstGeom prst="rect">
+            <a:avLst/>
+          </a:prstGeom>
+          <a:noFill/>
+          <a:ln/>
+        </p:spPr>
+        <p:txBody>
+          <a:bodyPr wrap="square" rtlCol="0" anchor="ctr"/>
+          <a:lstStyle/>
+          <a:p>
+            <a:pPr algn="ctr" indent="0" marL="0">
+              <a:buNone/>
+            </a:pPr>
+            <a:r>
+              <a:rPr lang="en-US" sz="1150" b="1" dirty="0">
+                <a:solidFill>
+                  <a:srgbClr val="0D1B2A"/>
+                </a:solidFill>
+              </a:rPr>
+              <a:t>🔴  DR</a:t>
+            </a:r>
+            <a:endParaRPr lang="en-US" sz="1150" dirty="0"/>
+          </a:p>
+          <a:p>
+            <a:pPr algn="ctr" indent="0" marL="0">
+              <a:buNone/>
+            </a:pPr>
+            <a:r>
+              <a:rPr lang="en-US" sz="1150" b="1" dirty="0">
+                <a:solidFill>
+                  <a:srgbClr val="0D1B2A"/>
+                </a:solidFill>
+              </a:rPr>
+              <a:t>Event</a:t>
+            </a:r>
+            <a:endParaRPr lang="en-US" sz="1150" dirty="0"/>
+          </a:p>
+        </p:txBody>
+      </p:sp>
+      <p:sp>
+        <p:nvSpPr>
+          <p:cNvPr id="8" name="Text 6"/>
+          <p:cNvSpPr/>
+          <p:nvPr/>
+        </p:nvSpPr>
+        <p:spPr>
+          <a:xfrm>
+            <a:off x="228600" y="2231136"/>
+            <a:ext cx="1325880" cy="384048"/>
+          </a:xfrm>
+          <a:prstGeom prst="rect">
+            <a:avLst/>
+          </a:prstGeom>
+          <a:noFill/>
+          <a:ln/>
+        </p:spPr>
+        <p:txBody>
+          <a:bodyPr wrap="square" rtlCol="0" anchor="ctr"/>
+          <a:lstStyle/>
+          <a:p>
+            <a:pPr algn="ctr" indent="0" marL="0">
+              <a:buNone/>
+            </a:pPr>
+            <a:r>
+              <a:rPr lang="en-US" sz="900" dirty="0">
+                <a:solidFill>
+                  <a:srgbClr val="4A5568"/>
+                </a:solidFill>
+              </a:rPr>
+              <a:t>Confluent cluster</a:t>
+            </a:r>
+            <a:endParaRPr lang="en-US" sz="900" dirty="0"/>
+          </a:p>
+          <a:p>
+            <a:pPr algn="ctr" indent="0" marL="0">
+              <a:buNone/>
+            </a:pPr>
+            <a:r>
+              <a:rPr lang="en-US" sz="900" dirty="0">
+                <a:solidFill>
+                  <a:srgbClr val="4A5568"/>
+                </a:solidFill>
+              </a:rPr>
+              <a:t>unavailable</a:t>
+            </a:r>
+            <a:endParaRPr lang="en-US" sz="900" dirty="0"/>
+          </a:p>
+        </p:txBody>
+      </p:sp>
+      <p:sp>
+        <p:nvSpPr>
+          <p:cNvPr id="9" name="Shape 7"/>
+          <p:cNvSpPr/>
+          <p:nvPr/>
+        </p:nvSpPr>
+        <p:spPr>
+          <a:xfrm>
+            <a:off x="1618488" y="2194560"/>
+            <a:ext cx="310896" cy="0"/>
+          </a:xfrm>
+          <a:prstGeom prst="line">
+            <a:avLst/>
+          </a:prstGeom>
+          <a:noFill/>
+          <a:ln w="25400">
+            <a:solidFill>
+              <a:srgbClr val="00A896"/>
+            </a:solidFill>
+            <a:prstDash val="solid"/>
+          </a:ln>
+        </p:spPr>
+      </p:sp>
+      <p:sp>
+        <p:nvSpPr>
+          <p:cNvPr id="10" name="Text 8"/>
+          <p:cNvSpPr/>
+          <p:nvPr/>
+        </p:nvSpPr>
+        <p:spPr>
+          <a:xfrm>
+            <a:off x="1828800" y="2066544"/>
+            <a:ext cx="182880" cy="256032"/>
+          </a:xfrm>
+          <a:prstGeom prst="rect">
+            <a:avLst/>
+          </a:prstGeom>
+          <a:noFill/>
+          <a:ln/>
+        </p:spPr>
+        <p:txBody>
+          <a:bodyPr wrap="square" rtlCol="0" anchor="ctr"/>
+          <a:lstStyle/>
+          <a:p>
+            <a:pPr algn="ctr" indent="0" marL="0">
+              <a:buNone/>
+            </a:pPr>
+            <a:r>
+              <a:rPr lang="en-US" sz="900" dirty="0">
+                <a:solidFill>
+                  <a:srgbClr val="00A896"/>
+                </a:solidFill>
+              </a:rPr>
+              <a:t>▶</a:t>
+            </a:r>
+            <a:endParaRPr lang="en-US" sz="900" dirty="0"/>
+          </a:p>
+        </p:txBody>
+      </p:sp>
+      <p:sp>
+        <p:nvSpPr>
+          <p:cNvPr id="11" name="Shape 9"/>
+          <p:cNvSpPr/>
+          <p:nvPr/>
+        </p:nvSpPr>
+        <p:spPr>
+          <a:xfrm>
+            <a:off x="1938528" y="1737360"/>
+            <a:ext cx="1417320" cy="914400"/>
+          </a:xfrm>
+          <a:prstGeom prst="roundRect">
+            <a:avLst>
+              <a:gd name="adj" fmla="val 10000"/>
+            </a:avLst>
+          </a:prstGeom>
+          <a:solidFill>
+            <a:srgbClr val="EBF5FB"/>
+          </a:solidFill>
+          <a:ln w="12700">
+            <a:solidFill>
+              <a:srgbClr val="0E4D92"/>
+            </a:solidFill>
+            <a:prstDash val="solid"/>
+          </a:ln>
+          <a:effectLst>
+            <a:outerShdw sx="100000" sy="100000" kx="0" ky="0" algn="bl" rotWithShape="0" blurRad="101600" dist="38100" dir="2700000">
+              <a:srgbClr val="000000">
+                <a:alpha val="12000"/>
+              </a:srgbClr>
+            </a:outerShdw>
+          </a:effectLst>
+        </p:spPr>
+      </p:sp>
+      <p:sp>
+        <p:nvSpPr>
+          <p:cNvPr id="12" name="Text 10"/>
+          <p:cNvSpPr/>
+          <p:nvPr/>
+        </p:nvSpPr>
+        <p:spPr>
+          <a:xfrm>
+            <a:off x="1938528" y="1773936"/>
+            <a:ext cx="1417320" cy="438912"/>
+          </a:xfrm>
+          <a:prstGeom prst="rect">
+            <a:avLst/>
+          </a:prstGeom>
+          <a:noFill/>
+          <a:ln/>
+        </p:spPr>
+        <p:txBody>
+          <a:bodyPr wrap="square" rtlCol="0" anchor="ctr"/>
+          <a:lstStyle/>
+          <a:p>
+            <a:pPr algn="ctr" indent="0" marL="0">
+              <a:buNone/>
+            </a:pPr>
+            <a:r>
+              <a:rPr lang="en-US" sz="1150" b="1" dirty="0">
+                <a:solidFill>
+                  <a:srgbClr val="0D1B2A"/>
+                </a:solidFill>
+              </a:rPr>
+              <a:t>⚙️  CI/CD</a:t>
+            </a:r>
+            <a:endParaRPr lang="en-US" sz="1150" dirty="0"/>
+          </a:p>
+          <a:p>
+            <a:pPr algn="ctr" indent="0" marL="0">
+              <a:buNone/>
+            </a:pPr>
+            <a:r>
+              <a:rPr lang="en-US" sz="1150" b="1" dirty="0">
+                <a:solidFill>
+                  <a:srgbClr val="0D1B2A"/>
+                </a:solidFill>
+              </a:rPr>
+              <a:t>Pipeline</a:t>
+            </a:r>
+            <a:endParaRPr lang="en-US" sz="1150" dirty="0"/>
+          </a:p>
+        </p:txBody>
+      </p:sp>
+      <p:sp>
+        <p:nvSpPr>
+          <p:cNvPr id="13" name="Text 11"/>
+          <p:cNvSpPr/>
+          <p:nvPr/>
+        </p:nvSpPr>
+        <p:spPr>
+          <a:xfrm>
+            <a:off x="1984248" y="2231136"/>
+            <a:ext cx="1325880" cy="384048"/>
+          </a:xfrm>
+          <a:prstGeom prst="rect">
+            <a:avLst/>
+          </a:prstGeom>
+          <a:noFill/>
+          <a:ln/>
+        </p:spPr>
+        <p:txBody>
+          <a:bodyPr wrap="square" rtlCol="0" anchor="ctr"/>
+          <a:lstStyle/>
+          <a:p>
+            <a:pPr algn="ctr" indent="0" marL="0">
+              <a:buNone/>
+            </a:pPr>
+            <a:r>
+              <a:rPr lang="en-US" sz="900" dirty="0">
+                <a:solidFill>
+                  <a:srgbClr val="4A5568"/>
+                </a:solidFill>
+              </a:rPr>
+              <a:t>Automated DR</a:t>
+            </a:r>
+            <a:endParaRPr lang="en-US" sz="900" dirty="0"/>
+          </a:p>
+          <a:p>
+            <a:pPr algn="ctr" indent="0" marL="0">
+              <a:buNone/>
+            </a:pPr>
+            <a:r>
+              <a:rPr lang="en-US" sz="900" dirty="0">
+                <a:solidFill>
+                  <a:srgbClr val="4A5568"/>
+                </a:solidFill>
+              </a:rPr>
+              <a:t>pipeline triggered</a:t>
+            </a:r>
+            <a:endParaRPr lang="en-US" sz="900" dirty="0"/>
+          </a:p>
+        </p:txBody>
+      </p:sp>
+      <p:sp>
+        <p:nvSpPr>
+          <p:cNvPr id="14" name="Shape 12"/>
+          <p:cNvSpPr/>
+          <p:nvPr/>
+        </p:nvSpPr>
+        <p:spPr>
+          <a:xfrm>
+            <a:off x="3374136" y="2194560"/>
+            <a:ext cx="310896" cy="0"/>
+          </a:xfrm>
+          <a:prstGeom prst="line">
+            <a:avLst/>
+          </a:prstGeom>
+          <a:noFill/>
+          <a:ln w="25400">
+            <a:solidFill>
+              <a:srgbClr val="00A896"/>
+            </a:solidFill>
+            <a:prstDash val="solid"/>
+          </a:ln>
+        </p:spPr>
+      </p:sp>
+      <p:sp>
+        <p:nvSpPr>
+          <p:cNvPr id="15" name="Text 13"/>
+          <p:cNvSpPr/>
+          <p:nvPr/>
+        </p:nvSpPr>
+        <p:spPr>
+          <a:xfrm>
+            <a:off x="3584448" y="2066544"/>
+            <a:ext cx="182880" cy="256032"/>
+          </a:xfrm>
+          <a:prstGeom prst="rect">
+            <a:avLst/>
+          </a:prstGeom>
+          <a:noFill/>
+          <a:ln/>
+        </p:spPr>
+        <p:txBody>
+          <a:bodyPr wrap="square" rtlCol="0" anchor="ctr"/>
+          <a:lstStyle/>
+          <a:p>
+            <a:pPr algn="ctr" indent="0" marL="0">
+              <a:buNone/>
+            </a:pPr>
+            <a:r>
+              <a:rPr lang="en-US" sz="900" dirty="0">
+                <a:solidFill>
+                  <a:srgbClr val="00A896"/>
+                </a:solidFill>
+              </a:rPr>
+              <a:t>▶</a:t>
+            </a:r>
+            <a:endParaRPr lang="en-US" sz="900" dirty="0"/>
+          </a:p>
+        </p:txBody>
+      </p:sp>
+      <p:sp>
+        <p:nvSpPr>
+          <p:cNvPr id="16" name="Shape 14"/>
+          <p:cNvSpPr/>
+          <p:nvPr/>
+        </p:nvSpPr>
+        <p:spPr>
+          <a:xfrm>
+            <a:off x="3694176" y="1737360"/>
+            <a:ext cx="1417320" cy="914400"/>
+          </a:xfrm>
+          <a:prstGeom prst="roundRect">
+            <a:avLst>
+              <a:gd name="adj" fmla="val 10000"/>
+            </a:avLst>
+          </a:prstGeom>
+          <a:solidFill>
+            <a:srgbClr val="FFFBEB"/>
+          </a:solidFill>
+          <a:ln w="12700">
+            <a:solidFill>
+              <a:srgbClr val="D97706"/>
+            </a:solidFill>
+            <a:prstDash val="solid"/>
+          </a:ln>
+          <a:effectLst>
+            <a:outerShdw sx="100000" sy="100000" kx="0" ky="0" algn="bl" rotWithShape="0" blurRad="101600" dist="38100" dir="2700000">
+              <a:srgbClr val="000000">
+                <a:alpha val="12000"/>
+              </a:srgbClr>
+            </a:outerShdw>
+          </a:effectLst>
+        </p:spPr>
+      </p:sp>
+      <p:sp>
+        <p:nvSpPr>
+          <p:cNvPr id="17" name="Text 15"/>
+          <p:cNvSpPr/>
+          <p:nvPr/>
+        </p:nvSpPr>
+        <p:spPr>
+          <a:xfrm>
+            <a:off x="3694176" y="1773936"/>
+            <a:ext cx="1417320" cy="438912"/>
+          </a:xfrm>
+          <a:prstGeom prst="rect">
+            <a:avLst/>
+          </a:prstGeom>
+          <a:noFill/>
+          <a:ln/>
+        </p:spPr>
+        <p:txBody>
+          <a:bodyPr wrap="square" rtlCol="0" anchor="ctr"/>
+          <a:lstStyle/>
+          <a:p>
+            <a:pPr algn="ctr" indent="0" marL="0">
+              <a:buNone/>
+            </a:pPr>
+            <a:r>
+              <a:rPr lang="en-US" sz="1150" b="1" dirty="0">
+                <a:solidFill>
+                  <a:srgbClr val="0D1B2A"/>
+                </a:solidFill>
+              </a:rPr>
+              <a:t>🔑  Azure</a:t>
+            </a:r>
+            <a:endParaRPr lang="en-US" sz="1150" dirty="0"/>
+          </a:p>
+          <a:p>
+            <a:pPr algn="ctr" indent="0" marL="0">
+              <a:buNone/>
+            </a:pPr>
+            <a:r>
+              <a:rPr lang="en-US" sz="1150" b="1" dirty="0">
+                <a:solidFill>
+                  <a:srgbClr val="0D1B2A"/>
+                </a:solidFill>
+              </a:rPr>
+              <a:t>Key Vault</a:t>
+            </a:r>
+            <a:endParaRPr lang="en-US" sz="1150" dirty="0"/>
+          </a:p>
+        </p:txBody>
+      </p:sp>
+      <p:sp>
+        <p:nvSpPr>
+          <p:cNvPr id="18" name="Text 16"/>
+          <p:cNvSpPr/>
+          <p:nvPr/>
+        </p:nvSpPr>
+        <p:spPr>
+          <a:xfrm>
+            <a:off x="3739896" y="2231136"/>
+            <a:ext cx="1325880" cy="384048"/>
+          </a:xfrm>
+          <a:prstGeom prst="rect">
+            <a:avLst/>
+          </a:prstGeom>
+          <a:noFill/>
+          <a:ln/>
+        </p:spPr>
+        <p:txBody>
+          <a:bodyPr wrap="square" rtlCol="0" anchor="ctr"/>
+          <a:lstStyle/>
+          <a:p>
+            <a:pPr algn="ctr" indent="0" marL="0">
+              <a:buNone/>
+            </a:pPr>
+            <a:r>
+              <a:rPr lang="en-US" sz="900" dirty="0">
+                <a:solidFill>
+                  <a:srgbClr val="4A5568"/>
+                </a:solidFill>
+              </a:rPr>
+              <a:t>Active bootstrap URL</a:t>
+            </a:r>
+            <a:endParaRPr lang="en-US" sz="900" dirty="0"/>
+          </a:p>
+          <a:p>
+            <a:pPr algn="ctr" indent="0" marL="0">
+              <a:buNone/>
+            </a:pPr>
+            <a:r>
+              <a:rPr lang="en-US" sz="900" dirty="0">
+                <a:solidFill>
+                  <a:srgbClr val="4A5568"/>
+                </a:solidFill>
+              </a:rPr>
+              <a:t>written to Key Vault</a:t>
+            </a:r>
+            <a:endParaRPr lang="en-US" sz="900" dirty="0"/>
+          </a:p>
+        </p:txBody>
+      </p:sp>
+      <p:sp>
+        <p:nvSpPr>
+          <p:cNvPr id="19" name="Shape 17"/>
+          <p:cNvSpPr/>
+          <p:nvPr/>
+        </p:nvSpPr>
+        <p:spPr>
+          <a:xfrm>
+            <a:off x="5129784" y="2194560"/>
+            <a:ext cx="310896" cy="0"/>
+          </a:xfrm>
+          <a:prstGeom prst="line">
+            <a:avLst/>
+          </a:prstGeom>
+          <a:noFill/>
+          <a:ln w="25400">
+            <a:solidFill>
+              <a:srgbClr val="00A896"/>
+            </a:solidFill>
+            <a:prstDash val="solid"/>
+          </a:ln>
+        </p:spPr>
+      </p:sp>
+      <p:sp>
+        <p:nvSpPr>
+          <p:cNvPr id="20" name="Text 18"/>
+          <p:cNvSpPr/>
+          <p:nvPr/>
+        </p:nvSpPr>
+        <p:spPr>
+          <a:xfrm>
+            <a:off x="5340096" y="2066544"/>
+            <a:ext cx="182880" cy="256032"/>
+          </a:xfrm>
+          <a:prstGeom prst="rect">
+            <a:avLst/>
+          </a:prstGeom>
+          <a:noFill/>
+          <a:ln/>
+        </p:spPr>
+        <p:txBody>
+          <a:bodyPr wrap="square" rtlCol="0" anchor="ctr"/>
+          <a:lstStyle/>
+          <a:p>
+            <a:pPr algn="ctr" indent="0" marL="0">
+              <a:buNone/>
+            </a:pPr>
+            <a:r>
+              <a:rPr lang="en-US" sz="900" dirty="0">
+                <a:solidFill>
+                  <a:srgbClr val="00A896"/>
+                </a:solidFill>
+              </a:rPr>
+              <a:t>▶</a:t>
+            </a:r>
+            <a:endParaRPr lang="en-US" sz="900" dirty="0"/>
+          </a:p>
+        </p:txBody>
+      </p:sp>
+      <p:sp>
+        <p:nvSpPr>
+          <p:cNvPr id="21" name="Shape 19"/>
+          <p:cNvSpPr/>
+          <p:nvPr/>
+        </p:nvSpPr>
+        <p:spPr>
+          <a:xfrm>
+            <a:off x="5449824" y="1737360"/>
+            <a:ext cx="1417320" cy="914400"/>
+          </a:xfrm>
+          <a:prstGeom prst="roundRect">
+            <a:avLst>
+              <a:gd name="adj" fmla="val 10000"/>
+            </a:avLst>
+          </a:prstGeom>
+          <a:solidFill>
+            <a:srgbClr val="E8F8F5"/>
+          </a:solidFill>
+          <a:ln w="12700">
+            <a:solidFill>
+              <a:srgbClr val="00A896"/>
+            </a:solidFill>
+            <a:prstDash val="solid"/>
+          </a:ln>
+          <a:effectLst>
+            <a:outerShdw sx="100000" sy="100000" kx="0" ky="0" algn="bl" rotWithShape="0" blurRad="101600" dist="38100" dir="2700000">
+              <a:srgbClr val="000000">
+                <a:alpha val="12000"/>
+              </a:srgbClr>
+            </a:outerShdw>
+          </a:effectLst>
+        </p:spPr>
+      </p:sp>
+      <p:sp>
+        <p:nvSpPr>
+          <p:cNvPr id="22" name="Text 20"/>
+          <p:cNvSpPr/>
+          <p:nvPr/>
+        </p:nvSpPr>
+        <p:spPr>
+          <a:xfrm>
+            <a:off x="5449824" y="1773936"/>
+            <a:ext cx="1417320" cy="438912"/>
+          </a:xfrm>
+          <a:prstGeom prst="rect">
+            <a:avLst/>
+          </a:prstGeom>
+          <a:noFill/>
+          <a:ln/>
+        </p:spPr>
+        <p:txBody>
+          <a:bodyPr wrap="square" rtlCol="0" anchor="ctr"/>
+          <a:lstStyle/>
+          <a:p>
+            <a:pPr algn="ctr" indent="0" marL="0">
+              <a:buNone/>
+            </a:pPr>
+            <a:r>
+              <a:rPr lang="en-US" sz="1150" b="1" dirty="0">
+                <a:solidFill>
+                  <a:srgbClr val="0D1B2A"/>
+                </a:solidFill>
+              </a:rPr>
+              <a:t>☁️  App reads</a:t>
+            </a:r>
+            <a:endParaRPr lang="en-US" sz="1150" dirty="0"/>
+          </a:p>
+          <a:p>
+            <a:pPr algn="ctr" indent="0" marL="0">
+              <a:buNone/>
+            </a:pPr>
+            <a:r>
+              <a:rPr lang="en-US" sz="1150" b="1" dirty="0">
+                <a:solidFill>
+                  <a:srgbClr val="0D1B2A"/>
+                </a:solidFill>
+              </a:rPr>
+              <a:t>Key Vault</a:t>
+            </a:r>
+            <a:endParaRPr lang="en-US" sz="1150" dirty="0"/>
+          </a:p>
+        </p:txBody>
+      </p:sp>
+      <p:sp>
+        <p:nvSpPr>
+          <p:cNvPr id="23" name="Text 21"/>
+          <p:cNvSpPr/>
+          <p:nvPr/>
+        </p:nvSpPr>
+        <p:spPr>
+          <a:xfrm>
+            <a:off x="5495544" y="2231136"/>
+            <a:ext cx="1325880" cy="384048"/>
+          </a:xfrm>
+          <a:prstGeom prst="rect">
+            <a:avLst/>
+          </a:prstGeom>
+          <a:noFill/>
+          <a:ln/>
+        </p:spPr>
+        <p:txBody>
+          <a:bodyPr wrap="square" rtlCol="0" anchor="ctr"/>
+          <a:lstStyle/>
+          <a:p>
+            <a:pPr algn="ctr" indent="0" marL="0">
+              <a:buNone/>
+            </a:pPr>
+            <a:r>
+              <a:rPr lang="en-US" sz="900" dirty="0">
+                <a:solidFill>
+                  <a:srgbClr val="4A5568"/>
+                </a:solidFill>
+              </a:rPr>
+              <a:t>Apps fetch active</a:t>
+            </a:r>
+            <a:endParaRPr lang="en-US" sz="900" dirty="0"/>
+          </a:p>
+          <a:p>
+            <a:pPr algn="ctr" indent="0" marL="0">
+              <a:buNone/>
+            </a:pPr>
+            <a:r>
+              <a:rPr lang="en-US" sz="900" dirty="0">
+                <a:solidFill>
+                  <a:srgbClr val="4A5568"/>
+                </a:solidFill>
+              </a:rPr>
+              <a:t>broker URL on restart</a:t>
+            </a:r>
+            <a:endParaRPr lang="en-US" sz="900" dirty="0"/>
+          </a:p>
+        </p:txBody>
+      </p:sp>
+      <p:sp>
+        <p:nvSpPr>
+          <p:cNvPr id="24" name="Shape 22"/>
+          <p:cNvSpPr/>
+          <p:nvPr/>
+        </p:nvSpPr>
+        <p:spPr>
+          <a:xfrm>
+            <a:off x="6885432" y="2194560"/>
+            <a:ext cx="310896" cy="0"/>
+          </a:xfrm>
+          <a:prstGeom prst="line">
+            <a:avLst/>
+          </a:prstGeom>
+          <a:noFill/>
+          <a:ln w="25400">
+            <a:solidFill>
+              <a:srgbClr val="00A896"/>
+            </a:solidFill>
+            <a:prstDash val="solid"/>
+          </a:ln>
+        </p:spPr>
+      </p:sp>
+      <p:sp>
+        <p:nvSpPr>
+          <p:cNvPr id="25" name="Text 23"/>
+          <p:cNvSpPr/>
+          <p:nvPr/>
+        </p:nvSpPr>
+        <p:spPr>
+          <a:xfrm>
+            <a:off x="7095744" y="2066544"/>
+            <a:ext cx="182880" cy="256032"/>
+          </a:xfrm>
+          <a:prstGeom prst="rect">
+            <a:avLst/>
+          </a:prstGeom>
+          <a:noFill/>
+          <a:ln/>
+        </p:spPr>
+        <p:txBody>
+          <a:bodyPr wrap="square" rtlCol="0" anchor="ctr"/>
+          <a:lstStyle/>
+          <a:p>
+            <a:pPr algn="ctr" indent="0" marL="0">
+              <a:buNone/>
+            </a:pPr>
+            <a:r>
+              <a:rPr lang="en-US" sz="900" dirty="0">
+                <a:solidFill>
+                  <a:srgbClr val="00A896"/>
+                </a:solidFill>
+              </a:rPr>
+              <a:t>▶</a:t>
+            </a:r>
+            <a:endParaRPr lang="en-US" sz="900" dirty="0"/>
+          </a:p>
+        </p:txBody>
+      </p:sp>
+      <p:sp>
+        <p:nvSpPr>
+          <p:cNvPr id="26" name="Shape 24"/>
+          <p:cNvSpPr/>
+          <p:nvPr/>
+        </p:nvSpPr>
+        <p:spPr>
+          <a:xfrm>
+            <a:off x="7205472" y="1737360"/>
+            <a:ext cx="1417320" cy="914400"/>
+          </a:xfrm>
+          <a:prstGeom prst="roundRect">
+            <a:avLst>
+              <a:gd name="adj" fmla="val 10000"/>
+            </a:avLst>
+          </a:prstGeom>
+          <a:solidFill>
+            <a:srgbClr val="F0FFF4"/>
+          </a:solidFill>
+          <a:ln w="12700">
+            <a:solidFill>
+              <a:srgbClr val="276749"/>
+            </a:solidFill>
+            <a:prstDash val="solid"/>
+          </a:ln>
+          <a:effectLst>
+            <a:outerShdw sx="100000" sy="100000" kx="0" ky="0" algn="bl" rotWithShape="0" blurRad="101600" dist="38100" dir="2700000">
+              <a:srgbClr val="000000">
+                <a:alpha val="12000"/>
+              </a:srgbClr>
+            </a:outerShdw>
+          </a:effectLst>
+        </p:spPr>
+      </p:sp>
+      <p:sp>
+        <p:nvSpPr>
+          <p:cNvPr id="27" name="Text 25"/>
+          <p:cNvSpPr/>
+          <p:nvPr/>
+        </p:nvSpPr>
+        <p:spPr>
+          <a:xfrm>
+            <a:off x="7205472" y="1773936"/>
+            <a:ext cx="1417320" cy="438912"/>
+          </a:xfrm>
+          <a:prstGeom prst="rect">
+            <a:avLst/>
+          </a:prstGeom>
+          <a:noFill/>
+          <a:ln/>
+        </p:spPr>
+        <p:txBody>
+          <a:bodyPr wrap="square" rtlCol="0" anchor="ctr"/>
+          <a:lstStyle/>
+          <a:p>
+            <a:pPr algn="ctr" indent="0" marL="0">
+              <a:buNone/>
+            </a:pPr>
+            <a:r>
+              <a:rPr lang="en-US" sz="1150" b="1" dirty="0">
+                <a:solidFill>
+                  <a:srgbClr val="0D1B2A"/>
+                </a:solidFill>
+              </a:rPr>
+              <a:t>✅  Restored</a:t>
+            </a:r>
+            <a:endParaRPr lang="en-US" sz="1150" dirty="0"/>
+          </a:p>
+          <a:p>
+            <a:pPr algn="ctr" indent="0" marL="0">
+              <a:buNone/>
+            </a:pPr>
+            <a:r>
+              <a:rPr lang="en-US" sz="1150" b="1" dirty="0">
+                <a:solidFill>
+                  <a:srgbClr val="0D1B2A"/>
+                </a:solidFill>
+              </a:rPr>
+              <a:t>Service</a:t>
+            </a:r>
+            <a:endParaRPr lang="en-US" sz="1150" dirty="0"/>
+          </a:p>
+        </p:txBody>
+      </p:sp>
+      <p:sp>
+        <p:nvSpPr>
+          <p:cNvPr id="28" name="Text 26"/>
+          <p:cNvSpPr/>
+          <p:nvPr/>
+        </p:nvSpPr>
+        <p:spPr>
+          <a:xfrm>
+            <a:off x="7251192" y="2231136"/>
+            <a:ext cx="1325880" cy="384048"/>
+          </a:xfrm>
+          <a:prstGeom prst="rect">
+            <a:avLst/>
+          </a:prstGeom>
+          <a:noFill/>
+          <a:ln/>
+        </p:spPr>
+        <p:txBody>
+          <a:bodyPr wrap="square" rtlCol="0" anchor="ctr"/>
+          <a:lstStyle/>
+          <a:p>
+            <a:pPr algn="ctr" indent="0" marL="0">
+              <a:buNone/>
+            </a:pPr>
+            <a:r>
+              <a:rPr lang="en-US" sz="900" dirty="0">
+                <a:solidFill>
+                  <a:srgbClr val="4A5568"/>
+                </a:solidFill>
+              </a:rPr>
+              <a:t>No config changes</a:t>
+            </a:r>
+            <a:endParaRPr lang="en-US" sz="900" dirty="0"/>
+          </a:p>
+          <a:p>
+            <a:pPr algn="ctr" indent="0" marL="0">
+              <a:buNone/>
+            </a:pPr>
+            <a:r>
+              <a:rPr lang="en-US" sz="900" dirty="0">
+                <a:solidFill>
+                  <a:srgbClr val="4A5568"/>
+                </a:solidFill>
+              </a:rPr>
+              <a:t>needed in apps</a:t>
+            </a:r>
+            <a:endParaRPr lang="en-US" sz="900" dirty="0"/>
+          </a:p>
+        </p:txBody>
+      </p:sp>
+      <p:sp>
+        <p:nvSpPr>
+          <p:cNvPr id="29" name="Shape 27"/>
+          <p:cNvSpPr/>
+          <p:nvPr/>
+        </p:nvSpPr>
+        <p:spPr>
+          <a:xfrm>
+            <a:off x="228600" y="2834640"/>
+            <a:ext cx="4160520" cy="1920240"/>
+          </a:xfrm>
+          <a:prstGeom prst="roundRect">
+            <a:avLst>
+              <a:gd name="adj" fmla="val 5714"/>
+            </a:avLst>
+          </a:prstGeom>
+          <a:solidFill>
+            <a:srgbClr val="EBF5FB"/>
+          </a:solidFill>
+          <a:ln w="12700">
+            <a:solidFill>
+              <a:srgbClr val="0E4D92"/>
+            </a:solidFill>
+            <a:prstDash val="solid"/>
+          </a:ln>
+          <a:effectLst>
+            <a:outerShdw sx="100000" sy="100000" kx="0" ky="0" algn="bl" rotWithShape="0" blurRad="101600" dist="38100" dir="2700000">
+              <a:srgbClr val="000000">
+                <a:alpha val="12000"/>
+              </a:srgbClr>
+            </a:outerShdw>
+          </a:effectLst>
+        </p:spPr>
+      </p:sp>
+      <p:sp>
+        <p:nvSpPr>
+          <p:cNvPr id="30" name="Text 28"/>
+          <p:cNvSpPr/>
+          <p:nvPr/>
+        </p:nvSpPr>
+        <p:spPr>
+          <a:xfrm>
+            <a:off x="228600" y="2834640"/>
+            <a:ext cx="4160520" cy="420624"/>
+          </a:xfrm>
+          <a:prstGeom prst="rect">
+            <a:avLst/>
+          </a:prstGeom>
+          <a:noFill/>
+          <a:ln/>
+        </p:spPr>
+        <p:txBody>
+          <a:bodyPr wrap="square" rtlCol="0" anchor="ctr"/>
+          <a:lstStyle/>
+          <a:p>
+            <a:pPr algn="ctr" indent="0" marL="0">
+              <a:buNone/>
+            </a:pPr>
+            <a:r>
+              <a:rPr lang="en-US" sz="1300" b="1" dirty="0">
+                <a:solidFill>
+                  <a:srgbClr val="0E4D92"/>
+                </a:solidFill>
+              </a:rPr>
+              <a:t>🔧  What We Built</a:t>
+            </a:r>
+            <a:endParaRPr lang="en-US" sz="1300" dirty="0"/>
+          </a:p>
+        </p:txBody>
+      </p:sp>
+      <p:sp>
+        <p:nvSpPr>
+          <p:cNvPr id="31" name="Text 29"/>
+          <p:cNvSpPr/>
+          <p:nvPr/>
+        </p:nvSpPr>
+        <p:spPr>
+          <a:xfrm>
+            <a:off x="365760" y="3291840"/>
+            <a:ext cx="3886200" cy="1417320"/>
+          </a:xfrm>
+          <a:prstGeom prst="rect">
+            <a:avLst/>
+          </a:prstGeom>
+          <a:noFill/>
+          <a:ln/>
+        </p:spPr>
+        <p:txBody>
+          <a:bodyPr wrap="square" rtlCol="0" anchor="ctr"/>
+          <a:lstStyle/>
+          <a:p>
+            <a:pPr marL="342900" indent="-342900">
+              <a:buSzPct val="100000"/>
+              <a:buChar char="•"/>
+            </a:pPr>
+            <a:r>
+              <a:rPr lang="en-US" sz="1050" dirty="0">
+                <a:solidFill>
+                  <a:srgbClr val="4A5568"/>
+                </a:solidFill>
+              </a:rPr>
+              <a:t>CI/CD pipelines for DR failover AND failback</a:t>
+            </a:r>
+            <a:endParaRPr lang="en-US" sz="1050" dirty="0"/>
+          </a:p>
+          <a:p>
+            <a:pPr marL="342900" indent="-342900">
+              <a:buSzPct val="100000"/>
+              <a:buChar char="•"/>
+            </a:pPr>
+            <a:r>
+              <a:rPr lang="en-US" sz="1050" dirty="0">
+                <a:solidFill>
+                  <a:srgbClr val="4A5568"/>
+                </a:solidFill>
+              </a:rPr>
+              <a:t>Pipeline writes active cluster bootstrap URL to Azure Key Vault on every switchover</a:t>
+            </a:r>
+            <a:endParaRPr lang="en-US" sz="1050" dirty="0"/>
+          </a:p>
+          <a:p>
+            <a:pPr marL="342900" indent="-342900">
+              <a:buSzPct val="100000"/>
+              <a:buChar char="•"/>
+            </a:pPr>
+            <a:r>
+              <a:rPr lang="en-US" sz="1050" dirty="0">
+                <a:solidFill>
+                  <a:srgbClr val="4A5568"/>
+                </a:solidFill>
+              </a:rPr>
+              <a:t>Applications read broker URL from Key Vault — zero config changes during DR</a:t>
+            </a:r>
+            <a:endParaRPr lang="en-US" sz="1050" dirty="0"/>
+          </a:p>
+        </p:txBody>
+      </p:sp>
+      <p:sp>
+        <p:nvSpPr>
+          <p:cNvPr id="32" name="Shape 30"/>
+          <p:cNvSpPr/>
+          <p:nvPr/>
+        </p:nvSpPr>
+        <p:spPr>
+          <a:xfrm>
+            <a:off x="4754880" y="2834640"/>
+            <a:ext cx="4160520" cy="1920240"/>
+          </a:xfrm>
+          <a:prstGeom prst="roundRect">
+            <a:avLst>
+              <a:gd name="adj" fmla="val 5714"/>
+            </a:avLst>
+          </a:prstGeom>
+          <a:solidFill>
+            <a:srgbClr val="E8F8F5"/>
+          </a:solidFill>
+          <a:ln w="12700">
+            <a:solidFill>
+              <a:srgbClr val="00A896"/>
+            </a:solidFill>
+            <a:prstDash val="solid"/>
+          </a:ln>
+          <a:effectLst>
+            <a:outerShdw sx="100000" sy="100000" kx="0" ky="0" algn="bl" rotWithShape="0" blurRad="101600" dist="38100" dir="2700000">
+              <a:srgbClr val="000000">
+                <a:alpha val="12000"/>
+              </a:srgbClr>
+            </a:outerShdw>
+          </a:effectLst>
+        </p:spPr>
+      </p:sp>
+      <p:sp>
+        <p:nvSpPr>
+          <p:cNvPr id="33" name="Text 31"/>
+          <p:cNvSpPr/>
+          <p:nvPr/>
+        </p:nvSpPr>
+        <p:spPr>
+          <a:xfrm>
+            <a:off x="4754880" y="2834640"/>
+            <a:ext cx="4160520" cy="420624"/>
+          </a:xfrm>
+          <a:prstGeom prst="rect">
+            <a:avLst/>
+          </a:prstGeom>
+          <a:noFill/>
+          <a:ln/>
+        </p:spPr>
+        <p:txBody>
+          <a:bodyPr wrap="square" rtlCol="0" anchor="ctr"/>
+          <a:lstStyle/>
+          <a:p>
+            <a:pPr algn="ctr" indent="0" marL="0">
+              <a:buNone/>
+            </a:pPr>
+            <a:r>
+              <a:rPr lang="en-US" sz="1300" b="1" dirty="0">
+                <a:solidFill>
+                  <a:srgbClr val="00A896"/>
+                </a:solidFill>
+              </a:rPr>
+              <a:t>💡  Service Discovery Pattern</a:t>
+            </a:r>
+            <a:endParaRPr lang="en-US" sz="1300" dirty="0"/>
+          </a:p>
+        </p:txBody>
+      </p:sp>
+      <p:sp>
+        <p:nvSpPr>
+          <p:cNvPr id="34" name="Text 32"/>
+          <p:cNvSpPr/>
+          <p:nvPr/>
+        </p:nvSpPr>
+        <p:spPr>
+          <a:xfrm>
+            <a:off x="4892040" y="3291840"/>
+            <a:ext cx="3886200" cy="1417320"/>
+          </a:xfrm>
+          <a:prstGeom prst="rect">
+            <a:avLst/>
+          </a:prstGeom>
+          <a:noFill/>
+          <a:ln/>
+        </p:spPr>
+        <p:txBody>
+          <a:bodyPr wrap="square" rtlCol="0" anchor="ctr"/>
+          <a:lstStyle/>
+          <a:p>
+            <a:pPr marL="342900" indent="-342900">
+              <a:buSzPct val="100000"/>
+              <a:buChar char="•"/>
+            </a:pPr>
+            <a:r>
+              <a:rPr lang="en-US" sz="1050" dirty="0">
+                <a:solidFill>
+                  <a:srgbClr val="4A5568"/>
+                </a:solidFill>
+              </a:rPr>
+              <a:t>Confluent does not provide a single unified broker URL across clusters</a:t>
+            </a:r>
+            <a:endParaRPr lang="en-US" sz="1050" dirty="0"/>
+          </a:p>
+          <a:p>
+            <a:pPr marL="342900" indent="-342900">
+              <a:buSzPct val="100000"/>
+              <a:buChar char="•"/>
+            </a:pPr>
+            <a:r>
+              <a:rPr lang="en-US" sz="1050" dirty="0">
+                <a:solidFill>
+                  <a:srgbClr val="4A5568"/>
+                </a:solidFill>
+              </a:rPr>
+              <a:t>Key Vault acts as the single source of truth for the active broker URL</a:t>
+            </a:r>
+            <a:endParaRPr lang="en-US" sz="1050" dirty="0"/>
+          </a:p>
+          <a:p>
+            <a:pPr marL="342900" indent="-342900">
+              <a:buSzPct val="100000"/>
+              <a:buChar char="•"/>
+            </a:pPr>
+            <a:r>
+              <a:rPr lang="en-US" sz="1050" dirty="0">
+                <a:solidFill>
+                  <a:srgbClr val="4A5568"/>
+                </a:solidFill>
+              </a:rPr>
+              <a:t>Applications must restart to pick up new Confluent cluster metadata</a:t>
+            </a:r>
+            <a:endParaRPr lang="en-US" sz="1050" dirty="0"/>
+          </a:p>
+        </p:txBody>
+      </p:sp>
+      <p:sp>
+        <p:nvSpPr>
+          <p:cNvPr id="35" name="Text 33"/>
+          <p:cNvSpPr/>
+          <p:nvPr/>
+        </p:nvSpPr>
+        <p:spPr>
+          <a:xfrm>
+            <a:off x="228600" y="4791456"/>
+            <a:ext cx="8686800" cy="320040"/>
+          </a:xfrm>
+          <a:prstGeom prst="rect">
+            <a:avLst/>
+          </a:prstGeom>
+          <a:noFill/>
+          <a:ln/>
+        </p:spPr>
+        <p:txBody>
+          <a:bodyPr wrap="square" rtlCol="0" anchor="ctr"/>
+          <a:lstStyle/>
+          <a:p>
+            <a:pPr algn="ctr" indent="0" marL="0">
+              <a:buNone/>
+            </a:pPr>
+            <a:r>
+              <a:rPr lang="en-US" sz="1050" b="1" i="1" dirty="0">
+                <a:solidFill>
+                  <a:srgbClr val="276749"/>
+                </a:solidFill>
+              </a:rPr>
+              <a:t>Result: DR switchover is fully automated with near-zero application impact — only a restart is required</a:t>
+            </a:r>
+            <a:endParaRPr lang="en-US" sz="1050" dirty="0"/>
           </a:p>
         </p:txBody>
       </p:sp>
